--- a/public/fun/pack/pptx/birthdaypro/돌잔치프리미엄_42_돌잡이중심_제이드실버.pptx
+++ b/public/fun/pack/pptx/birthdaypro/돌잔치프리미엄_42_돌잡이중심_제이드실버.pptx
@@ -112,12 +112,12 @@
   <p:extLst>
     <p:ext uri="{521415D9-36F7-43E2-AB2F-B90AF26B5E84}">
       <p14:sectionLst xmlns:p14="http://schemas.microsoft.com/office/powerpoint/2010/main">
-        <p14:section name="시작" id="{36775EF0-5333-4CAD-A8E5-5F249FFE7E79}">
+        <p14:section name="시작" id="{71926E13-B72A-4B4F-9944-31CC75B4461F}">
           <p14:sldIdLst>
             <p14:sldId id="256"/>
           </p14:sldIdLst>
         </p14:section>
-        <p14:section name="본문" id="{94C8B065-1BF8-4CEF-A929-A2EBEDE81FC7}">
+        <p14:section name="본문" id="{DF63B4BE-0653-4D83-BEA6-92F0E654CA4F}">
           <p14:sldIdLst>
             <p14:sldId id="257"/>
             <p14:sldId id="258"/>
@@ -125,7 +125,7 @@
             <p14:sldId id="260"/>
           </p14:sldIdLst>
         </p14:section>
-        <p14:section name="마무리" id="{EBA35096-03C9-4CC1-90E6-B2A7318F50D7}">
+        <p14:section name="마무리" id="{86A9DFA9-406C-43D7-A49A-7592F86EEFB7}">
           <p14:sldIdLst>
             <p14:sldId id="261"/>
           </p14:sldIdLst>
@@ -1573,7 +1573,7 @@
             </a:lvl1pPr>
           </a:lstStyle>
           <a:p>
-            <a:fld id="{ABE5044C-2F33-41E4-9668-DD160E218FD7}" type="slidenum">
+            <a:fld id="{C58D03F7-5D7B-4D6C-87D7-4EB5E4165717}" type="slidenum">
               <a:rPr lang="en-US"/>
               <a:t>‹#›</a:t>
             </a:fld>
@@ -2381,7 +2381,7 @@
             </a:lvl1pPr>
           </a:lstStyle>
           <a:p>
-            <a:fld id="{93B5D552-63B9-432F-932B-FDE9D75827AE}" type="slidenum">
+            <a:fld id="{1EE30279-502A-418D-B06D-E22F49A7D166}" type="slidenum">
               <a:rPr lang="en-US"/>
               <a:t>‹#›</a:t>
             </a:fld>
@@ -3065,7 +3065,7 @@
             </a:lvl1pPr>
           </a:lstStyle>
           <a:p>
-            <a:fld id="{6B7B2F73-52DC-433B-A402-98E97421EAED}" type="slidenum">
+            <a:fld id="{CD14A5E7-FC9B-4BFA-B9BF-C1C9DFF16462}" type="slidenum">
               <a:rPr lang="en-US"/>
               <a:t>‹#›</a:t>
             </a:fld>
@@ -3910,7 +3910,7 @@
           <a:p>
             <a:r>
               <a:rPr lang="ko-KR"/>
-              <a:t>아기 이름 · 0000. 00. 00</a:t>
+              <a:t>아기 이름 · 날짜 입력</a:t>
             </a:r>
           </a:p>
           <a:p>
@@ -4072,7 +4072,7 @@
           <a:bodyPr/>
           <a:lstStyle/>
           <a:p>
-            <a:fld id="{3DE563A2-6C6B-4876-A429-B67C2892465C}" type="slidenum">
+            <a:fld id="{4D648619-3BB1-44AB-9C98-7F8928BAF55E}" type="slidenum">
               <a:rPr lang="en-US"/>
               <a:t>‹#›</a:t>
             </a:fld>
@@ -4672,7 +4672,7 @@
           <a:bodyPr/>
           <a:lstStyle/>
           <a:p>
-            <a:fld id="{F3FDF64D-ABF2-43B6-9623-A5AE4BAA822E}" type="slidenum">
+            <a:fld id="{4BD98BFB-053F-4C0B-A174-DE4AEF998285}" type="slidenum">
               <a:rPr lang="en-US"/>
               <a:t>‹#›</a:t>
             </a:fld>
@@ -5835,7 +5835,7 @@
           <a:bodyPr/>
           <a:lstStyle/>
           <a:p>
-            <a:fld id="{6DB37028-BDC2-45FF-81AE-1967C9918B3E}" type="slidenum">
+            <a:fld id="{4FA8F12F-BEED-4806-A933-341C53292A64}" type="slidenum">
               <a:rPr lang="en-US"/>
               <a:t>‹#›</a:t>
             </a:fld>
@@ -6581,7 +6581,7 @@
           <a:bodyPr/>
           <a:lstStyle/>
           <a:p>
-            <a:fld id="{6E041D06-5A91-40C9-93FC-E52283ED503B}" type="slidenum">
+            <a:fld id="{85185DFC-AE0E-466B-80BC-F3E28C93DA35}" type="slidenum">
               <a:rPr lang="en-US"/>
               <a:t>‹#›</a:t>
             </a:fld>
